--- a/论文图片/图片转pdf/第二章/动画网格渲染流程框架图.pptx
+++ b/论文图片/图片转pdf/第二章/动画网格渲染流程框架图.pptx
@@ -3136,7 +3136,7 @@
                   <a:latin typeface="宋体" panose="02010600030101010101" pitchFamily="2" charset="-122"/>
                   <a:ea typeface="宋体" panose="02010600030101010101" pitchFamily="2" charset="-122"/>
                 </a:rPr>
-                <a:t>对象定义</a:t>
+                <a:t>场景图遍历</a:t>
               </a:r>
               <a:endParaRPr lang="zh-CN" altLang="en-US" sz="1600" b="1">
                 <a:solidFill>
@@ -3374,7 +3374,7 @@
                   <a:latin typeface="宋体" panose="02010600030101010101" pitchFamily="2" charset="-122"/>
                   <a:ea typeface="宋体" panose="02010600030101010101" pitchFamily="2" charset="-122"/>
                 </a:rPr>
-                <a:t>对象处理</a:t>
+                <a:t>数据预处理</a:t>
               </a:r>
               <a:endParaRPr lang="zh-CN" altLang="en-US" sz="1600" b="1">
                 <a:solidFill>
@@ -3437,7 +3437,7 @@
                   <a:latin typeface="宋体" panose="02010600030101010101" pitchFamily="2" charset="-122"/>
                   <a:ea typeface="宋体" panose="02010600030101010101" pitchFamily="2" charset="-122"/>
                 </a:rPr>
-                <a:t>对象处理</a:t>
+                <a:t>物理仿真更新</a:t>
               </a:r>
               <a:endParaRPr lang="zh-CN" altLang="en-US" sz="1600" b="1">
                 <a:solidFill>

--- a/论文图片/图片转pdf/第二章/动画网格渲染流程框架图.pptx
+++ b/论文图片/图片转pdf/第二章/动画网格渲染流程框架图.pptx
@@ -2930,345 +2930,320 @@
         <p:nvPr/>
       </p:nvGrpSpPr>
       <p:grpSpPr/>
-      <p:grpSp>
-        <p:nvGrpSpPr>
-          <p:cNvPr id="86" name="组合 85"/>
-          <p:cNvGrpSpPr/>
+      <p:sp>
+        <p:nvSpPr>
+          <p:cNvPr id="32" name="矩形 31"/>
+          <p:cNvSpPr/>
           <p:nvPr/>
-        </p:nvGrpSpPr>
-        <p:grpSpPr>
-          <a:xfrm>
-            <a:off x="80010" y="-29845"/>
-            <a:ext cx="11107489" cy="3188990"/>
-            <a:chOff x="471" y="2028"/>
-            <a:chExt cx="17492" cy="5022"/>
-          </a:xfrm>
-        </p:grpSpPr>
-        <p:sp>
-          <p:nvSpPr>
-            <p:cNvPr id="32" name="矩形 31"/>
-            <p:cNvSpPr/>
-            <p:nvPr/>
-          </p:nvSpPr>
-          <p:spPr>
-            <a:xfrm>
-              <a:off x="10988" y="3495"/>
-              <a:ext cx="3139" cy="3555"/>
-            </a:xfrm>
-            <a:prstGeom prst="rect">
-              <a:avLst/>
-            </a:prstGeom>
+        </p:nvSpPr>
+        <p:spPr>
+          <a:xfrm>
+            <a:off x="6758305" y="901700"/>
+            <a:ext cx="1993265" cy="2257425"/>
+          </a:xfrm>
+          <a:prstGeom prst="rect">
+            <a:avLst/>
+          </a:prstGeom>
+          <a:solidFill>
+            <a:srgbClr val="E6F1E0"/>
+          </a:solidFill>
+          <a:ln>
             <a:solidFill>
-              <a:srgbClr val="E6F1E0"/>
+              <a:schemeClr val="tx1"/>
             </a:solidFill>
-            <a:ln>
-              <a:solidFill>
-                <a:schemeClr val="tx1"/>
-              </a:solidFill>
-            </a:ln>
-          </p:spPr>
-          <p:style>
-            <a:lnRef idx="2">
-              <a:schemeClr val="accent1">
-                <a:lumMod val="75000"/>
-              </a:schemeClr>
-            </a:lnRef>
-            <a:fillRef idx="1">
-              <a:schemeClr val="accent1"/>
-            </a:fillRef>
-            <a:effectRef idx="0">
-              <a:srgbClr val="FFFFFF"/>
-            </a:effectRef>
-            <a:fontRef idx="minor">
-              <a:schemeClr val="lt1"/>
-            </a:fontRef>
-          </p:style>
-          <p:txBody>
-            <a:bodyPr rtlCol="0" anchor="ctr"/>
-            <a:p>
-              <a:pPr algn="ctr"/>
-              <a:endParaRPr lang="zh-CN" altLang="en-US" sz="1600"/>
-            </a:p>
-          </p:txBody>
-        </p:sp>
-        <p:sp>
-          <p:nvSpPr>
-            <p:cNvPr id="27" name="矩形 26"/>
-            <p:cNvSpPr/>
-            <p:nvPr/>
-          </p:nvSpPr>
-          <p:spPr>
-            <a:xfrm>
-              <a:off x="5708" y="3487"/>
-              <a:ext cx="3083" cy="3555"/>
-            </a:xfrm>
-            <a:prstGeom prst="rect">
-              <a:avLst/>
-            </a:prstGeom>
+          </a:ln>
+        </p:spPr>
+        <p:style>
+          <a:lnRef idx="2">
+            <a:schemeClr val="accent1">
+              <a:lumMod val="75000"/>
+            </a:schemeClr>
+          </a:lnRef>
+          <a:fillRef idx="1">
+            <a:schemeClr val="accent1"/>
+          </a:fillRef>
+          <a:effectRef idx="0">
+            <a:srgbClr val="FFFFFF"/>
+          </a:effectRef>
+          <a:fontRef idx="minor">
+            <a:schemeClr val="lt1"/>
+          </a:fontRef>
+        </p:style>
+        <p:txBody>
+          <a:bodyPr rtlCol="0" anchor="ctr"/>
+          <a:p>
+            <a:pPr algn="ctr"/>
+            <a:endParaRPr lang="zh-CN" altLang="en-US" sz="1600"/>
+          </a:p>
+        </p:txBody>
+      </p:sp>
+      <p:sp>
+        <p:nvSpPr>
+          <p:cNvPr id="27" name="矩形 26"/>
+          <p:cNvSpPr/>
+          <p:nvPr/>
+        </p:nvSpPr>
+        <p:spPr>
+          <a:xfrm>
+            <a:off x="3405505" y="896620"/>
+            <a:ext cx="1957705" cy="2257425"/>
+          </a:xfrm>
+          <a:prstGeom prst="rect">
+            <a:avLst/>
+          </a:prstGeom>
+          <a:solidFill>
+            <a:srgbClr val="FBEDE0"/>
+          </a:solidFill>
+          <a:ln>
             <a:solidFill>
-              <a:srgbClr val="FBEDE0"/>
+              <a:schemeClr val="tx1"/>
             </a:solidFill>
-            <a:ln>
-              <a:solidFill>
-                <a:schemeClr val="tx1"/>
-              </a:solidFill>
-            </a:ln>
-          </p:spPr>
-          <p:style>
-            <a:lnRef idx="2">
-              <a:schemeClr val="accent1">
-                <a:lumMod val="75000"/>
-              </a:schemeClr>
-            </a:lnRef>
-            <a:fillRef idx="1">
-              <a:schemeClr val="accent1"/>
-            </a:fillRef>
-            <a:effectRef idx="0">
-              <a:srgbClr val="FFFFFF"/>
-            </a:effectRef>
-            <a:fontRef idx="minor">
-              <a:schemeClr val="lt1"/>
-            </a:fontRef>
-          </p:style>
-          <p:txBody>
-            <a:bodyPr rtlCol="0" anchor="ctr"/>
-            <a:p>
-              <a:pPr algn="ctr"/>
-              <a:endParaRPr lang="zh-CN" altLang="en-US" sz="1600"/>
-            </a:p>
-          </p:txBody>
-        </p:sp>
-        <p:sp>
-          <p:nvSpPr>
-            <p:cNvPr id="5" name="矩形 4"/>
-            <p:cNvSpPr/>
-            <p:nvPr/>
-          </p:nvSpPr>
-          <p:spPr>
-            <a:xfrm>
-              <a:off x="471" y="3490"/>
-              <a:ext cx="3082" cy="3554"/>
-            </a:xfrm>
-            <a:prstGeom prst="rect">
-              <a:avLst/>
-            </a:prstGeom>
+          </a:ln>
+        </p:spPr>
+        <p:style>
+          <a:lnRef idx="2">
+            <a:schemeClr val="accent1">
+              <a:lumMod val="75000"/>
+            </a:schemeClr>
+          </a:lnRef>
+          <a:fillRef idx="1">
+            <a:schemeClr val="accent1"/>
+          </a:fillRef>
+          <a:effectRef idx="0">
+            <a:srgbClr val="FFFFFF"/>
+          </a:effectRef>
+          <a:fontRef idx="minor">
+            <a:schemeClr val="lt1"/>
+          </a:fontRef>
+        </p:style>
+        <p:txBody>
+          <a:bodyPr rtlCol="0" anchor="ctr"/>
+          <a:p>
+            <a:pPr algn="ctr"/>
+            <a:endParaRPr lang="zh-CN" altLang="en-US" sz="1600"/>
+          </a:p>
+        </p:txBody>
+      </p:sp>
+      <p:sp>
+        <p:nvSpPr>
+          <p:cNvPr id="5" name="矩形 4"/>
+          <p:cNvSpPr/>
+          <p:nvPr/>
+        </p:nvSpPr>
+        <p:spPr>
+          <a:xfrm>
+            <a:off x="80010" y="898525"/>
+            <a:ext cx="1957070" cy="2256790"/>
+          </a:xfrm>
+          <a:prstGeom prst="rect">
+            <a:avLst/>
+          </a:prstGeom>
+          <a:solidFill>
+            <a:srgbClr val="E5EFF8"/>
+          </a:solidFill>
+          <a:ln>
             <a:solidFill>
-              <a:srgbClr val="E5EFF8"/>
+              <a:schemeClr val="tx1"/>
             </a:solidFill>
-            <a:ln>
-              <a:solidFill>
-                <a:schemeClr val="tx1"/>
-              </a:solidFill>
-            </a:ln>
-          </p:spPr>
-          <p:style>
-            <a:lnRef idx="2">
-              <a:schemeClr val="accent1">
-                <a:lumMod val="75000"/>
-              </a:schemeClr>
-            </a:lnRef>
-            <a:fillRef idx="1">
-              <a:schemeClr val="accent1"/>
-            </a:fillRef>
-            <a:effectRef idx="0">
-              <a:srgbClr val="FFFFFF"/>
-            </a:effectRef>
-            <a:fontRef idx="minor">
-              <a:schemeClr val="lt1"/>
-            </a:fontRef>
-          </p:style>
-          <p:txBody>
-            <a:bodyPr rtlCol="0" anchor="ctr"/>
-            <a:p>
-              <a:pPr algn="ctr"/>
-              <a:endParaRPr lang="zh-CN" altLang="en-US" sz="1600"/>
-            </a:p>
-          </p:txBody>
-        </p:sp>
-        <p:sp>
-          <p:nvSpPr>
-            <p:cNvPr id="9" name="矩形 8"/>
-            <p:cNvSpPr/>
-            <p:nvPr/>
-          </p:nvSpPr>
-          <p:spPr>
-            <a:xfrm>
-              <a:off x="776" y="4247"/>
-              <a:ext cx="2459" cy="518"/>
-            </a:xfrm>
-            <a:prstGeom prst="rect">
-              <a:avLst/>
-            </a:prstGeom>
+          </a:ln>
+        </p:spPr>
+        <p:style>
+          <a:lnRef idx="2">
+            <a:schemeClr val="accent1">
+              <a:lumMod val="75000"/>
+            </a:schemeClr>
+          </a:lnRef>
+          <a:fillRef idx="1">
+            <a:schemeClr val="accent1"/>
+          </a:fillRef>
+          <a:effectRef idx="0">
+            <a:srgbClr val="FFFFFF"/>
+          </a:effectRef>
+          <a:fontRef idx="minor">
+            <a:schemeClr val="lt1"/>
+          </a:fontRef>
+        </p:style>
+        <p:txBody>
+          <a:bodyPr rtlCol="0" anchor="ctr"/>
+          <a:p>
+            <a:pPr algn="ctr"/>
+            <a:endParaRPr lang="zh-CN" altLang="en-US" sz="1600"/>
+          </a:p>
+        </p:txBody>
+      </p:sp>
+      <p:sp>
+        <p:nvSpPr>
+          <p:cNvPr id="9" name="矩形 8"/>
+          <p:cNvSpPr/>
+          <p:nvPr/>
+        </p:nvSpPr>
+        <p:spPr>
+          <a:xfrm>
+            <a:off x="273685" y="1379220"/>
+            <a:ext cx="1561465" cy="328930"/>
+          </a:xfrm>
+          <a:prstGeom prst="rect">
+            <a:avLst/>
+          </a:prstGeom>
+          <a:solidFill>
+            <a:srgbClr val="BBD6EB"/>
+          </a:solidFill>
+          <a:ln>
             <a:solidFill>
-              <a:srgbClr val="BBD6EB"/>
+              <a:schemeClr val="tx1"/>
             </a:solidFill>
-            <a:ln>
-              <a:solidFill>
-                <a:schemeClr val="tx1"/>
-              </a:solidFill>
-            </a:ln>
-          </p:spPr>
-          <p:style>
-            <a:lnRef idx="2">
-              <a:schemeClr val="accent1">
-                <a:lumMod val="75000"/>
-              </a:schemeClr>
-            </a:lnRef>
-            <a:fillRef idx="1">
-              <a:schemeClr val="accent1"/>
-            </a:fillRef>
-            <a:effectRef idx="0">
-              <a:srgbClr val="FFFFFF"/>
-            </a:effectRef>
-            <a:fontRef idx="minor">
-              <a:schemeClr val="lt1"/>
-            </a:fontRef>
-          </p:style>
-          <p:txBody>
-            <a:bodyPr rtlCol="0" anchor="ctr"/>
-            <a:p>
-              <a:pPr algn="ctr"/>
-              <a:r>
-                <a:rPr lang="zh-CN" altLang="en-US" sz="1600" b="1">
-                  <a:solidFill>
-                    <a:schemeClr val="tx1"/>
-                  </a:solidFill>
-                  <a:latin typeface="宋体" panose="02010600030101010101" pitchFamily="2" charset="-122"/>
-                  <a:ea typeface="宋体" panose="02010600030101010101" pitchFamily="2" charset="-122"/>
-                </a:rPr>
-                <a:t>场景图遍历</a:t>
-              </a:r>
-              <a:endParaRPr lang="zh-CN" altLang="en-US" sz="1600" b="1">
+          </a:ln>
+        </p:spPr>
+        <p:style>
+          <a:lnRef idx="2">
+            <a:schemeClr val="accent1">
+              <a:lumMod val="75000"/>
+            </a:schemeClr>
+          </a:lnRef>
+          <a:fillRef idx="1">
+            <a:schemeClr val="accent1"/>
+          </a:fillRef>
+          <a:effectRef idx="0">
+            <a:srgbClr val="FFFFFF"/>
+          </a:effectRef>
+          <a:fontRef idx="minor">
+            <a:schemeClr val="lt1"/>
+          </a:fontRef>
+        </p:style>
+        <p:txBody>
+          <a:bodyPr rtlCol="0" anchor="ctr"/>
+          <a:p>
+            <a:pPr algn="ctr"/>
+            <a:r>
+              <a:rPr lang="zh-CN" altLang="en-US" sz="1600">
                 <a:solidFill>
                   <a:schemeClr val="tx1"/>
                 </a:solidFill>
                 <a:latin typeface="宋体" panose="02010600030101010101" pitchFamily="2" charset="-122"/>
                 <a:ea typeface="宋体" panose="02010600030101010101" pitchFamily="2" charset="-122"/>
-              </a:endParaRPr>
-            </a:p>
-          </p:txBody>
-        </p:sp>
-        <p:sp>
-          <p:nvSpPr>
-            <p:cNvPr id="13" name="矩形 12"/>
-            <p:cNvSpPr/>
-            <p:nvPr/>
-          </p:nvSpPr>
-          <p:spPr>
-            <a:xfrm>
-              <a:off x="6020" y="4244"/>
-              <a:ext cx="2459" cy="518"/>
-            </a:xfrm>
-            <a:prstGeom prst="rect">
-              <a:avLst/>
-            </a:prstGeom>
-            <a:solidFill>
-              <a:srgbClr val="F7CAAB"/>
-            </a:solidFill>
-            <a:ln>
+              </a:rPr>
+              <a:t>场景图遍历</a:t>
+            </a:r>
+            <a:endParaRPr lang="zh-CN" altLang="en-US" sz="1600">
               <a:solidFill>
                 <a:schemeClr val="tx1"/>
               </a:solidFill>
-            </a:ln>
-          </p:spPr>
-          <p:style>
-            <a:lnRef idx="2">
-              <a:schemeClr val="accent1">
-                <a:lumMod val="75000"/>
-              </a:schemeClr>
-            </a:lnRef>
-            <a:fillRef idx="1">
-              <a:schemeClr val="accent1"/>
-            </a:fillRef>
-            <a:effectRef idx="0">
-              <a:srgbClr val="FFFFFF"/>
-            </a:effectRef>
-            <a:fontRef idx="minor">
-              <a:schemeClr val="lt1"/>
-            </a:fontRef>
-          </p:style>
-          <p:txBody>
-            <a:bodyPr rtlCol="0" anchor="ctr"/>
-            <a:p>
-              <a:pPr algn="ctr"/>
-              <a:r>
-                <a:rPr lang="zh-CN" altLang="en-US" sz="1600" b="1">
-                  <a:solidFill>
-                    <a:schemeClr val="tx1"/>
-                  </a:solidFill>
-                  <a:latin typeface="宋体" panose="02010600030101010101" pitchFamily="2" charset="-122"/>
-                  <a:ea typeface="宋体" panose="02010600030101010101" pitchFamily="2" charset="-122"/>
-                  <a:cs typeface="宋体" panose="02010600030101010101" pitchFamily="2" charset="-122"/>
-                </a:rPr>
-                <a:t>顶点着色</a:t>
-              </a:r>
-              <a:endParaRPr lang="zh-CN" altLang="en-US" sz="1600" b="1">
+              <a:latin typeface="宋体" panose="02010600030101010101" pitchFamily="2" charset="-122"/>
+              <a:ea typeface="宋体" panose="02010600030101010101" pitchFamily="2" charset="-122"/>
+            </a:endParaRPr>
+          </a:p>
+        </p:txBody>
+      </p:sp>
+      <p:sp>
+        <p:nvSpPr>
+          <p:cNvPr id="13" name="矩形 12"/>
+          <p:cNvSpPr/>
+          <p:nvPr/>
+        </p:nvSpPr>
+        <p:spPr>
+          <a:xfrm>
+            <a:off x="3603625" y="1377315"/>
+            <a:ext cx="1561465" cy="328930"/>
+          </a:xfrm>
+          <a:prstGeom prst="rect">
+            <a:avLst/>
+          </a:prstGeom>
+          <a:solidFill>
+            <a:srgbClr val="F7CAAB"/>
+          </a:solidFill>
+          <a:ln>
+            <a:solidFill>
+              <a:schemeClr val="tx1"/>
+            </a:solidFill>
+          </a:ln>
+        </p:spPr>
+        <p:style>
+          <a:lnRef idx="2">
+            <a:schemeClr val="accent1">
+              <a:lumMod val="75000"/>
+            </a:schemeClr>
+          </a:lnRef>
+          <a:fillRef idx="1">
+            <a:schemeClr val="accent1"/>
+          </a:fillRef>
+          <a:effectRef idx="0">
+            <a:srgbClr val="FFFFFF"/>
+          </a:effectRef>
+          <a:fontRef idx="minor">
+            <a:schemeClr val="lt1"/>
+          </a:fontRef>
+        </p:style>
+        <p:txBody>
+          <a:bodyPr rtlCol="0" anchor="ctr"/>
+          <a:p>
+            <a:pPr algn="ctr"/>
+            <a:r>
+              <a:rPr lang="zh-CN" altLang="en-US" sz="1600">
                 <a:solidFill>
                   <a:schemeClr val="tx1"/>
                 </a:solidFill>
                 <a:latin typeface="宋体" panose="02010600030101010101" pitchFamily="2" charset="-122"/>
                 <a:ea typeface="宋体" panose="02010600030101010101" pitchFamily="2" charset="-122"/>
                 <a:cs typeface="宋体" panose="02010600030101010101" pitchFamily="2" charset="-122"/>
-              </a:endParaRPr>
-            </a:p>
-          </p:txBody>
-        </p:sp>
-        <p:sp>
-          <p:nvSpPr>
-            <p:cNvPr id="14" name="矩形 13"/>
-            <p:cNvSpPr/>
-            <p:nvPr/>
-          </p:nvSpPr>
-          <p:spPr>
-            <a:xfrm>
-              <a:off x="11378" y="4230"/>
-              <a:ext cx="2459" cy="494"/>
-            </a:xfrm>
-            <a:prstGeom prst="rect">
-              <a:avLst/>
-            </a:prstGeom>
-            <a:solidFill>
-              <a:srgbClr val="C5DFB2"/>
-            </a:solidFill>
-            <a:ln>
+              </a:rPr>
+              <a:t>顶点着色</a:t>
+            </a:r>
+            <a:endParaRPr lang="zh-CN" altLang="en-US" sz="1600">
               <a:solidFill>
                 <a:schemeClr val="tx1"/>
               </a:solidFill>
-            </a:ln>
-          </p:spPr>
-          <p:style>
-            <a:lnRef idx="2">
-              <a:schemeClr val="accent1">
-                <a:lumMod val="75000"/>
-              </a:schemeClr>
-            </a:lnRef>
-            <a:fillRef idx="1">
-              <a:schemeClr val="accent1"/>
-            </a:fillRef>
-            <a:effectRef idx="0">
-              <a:srgbClr val="FFFFFF"/>
-            </a:effectRef>
-            <a:fontRef idx="minor">
-              <a:schemeClr val="lt1"/>
-            </a:fontRef>
-          </p:style>
-          <p:txBody>
-            <a:bodyPr rtlCol="0" anchor="ctr"/>
-            <a:p>
-              <a:pPr algn="ctr"/>
-              <a:r>
-                <a:rPr lang="zh-CN" altLang="en-US" sz="1600" b="1">
-                  <a:solidFill>
-                    <a:schemeClr val="tx1"/>
-                  </a:solidFill>
-                  <a:latin typeface="Times New Roman" panose="02020603050405020304" charset="0"/>
-                  <a:ea typeface="宋体" panose="02010600030101010101" pitchFamily="2" charset="-122"/>
-                  <a:cs typeface="Times New Roman" panose="02020603050405020304" charset="0"/>
-                  <a:sym typeface="+mn-ea"/>
-                </a:rPr>
-                <a:t>片段转化</a:t>
-              </a:r>
-              <a:endParaRPr lang="zh-CN" altLang="en-US" sz="1600" b="1">
+              <a:latin typeface="宋体" panose="02010600030101010101" pitchFamily="2" charset="-122"/>
+              <a:ea typeface="宋体" panose="02010600030101010101" pitchFamily="2" charset="-122"/>
+              <a:cs typeface="宋体" panose="02010600030101010101" pitchFamily="2" charset="-122"/>
+            </a:endParaRPr>
+          </a:p>
+        </p:txBody>
+      </p:sp>
+      <p:sp>
+        <p:nvSpPr>
+          <p:cNvPr id="14" name="矩形 13"/>
+          <p:cNvSpPr/>
+          <p:nvPr/>
+        </p:nvSpPr>
+        <p:spPr>
+          <a:xfrm>
+            <a:off x="7005955" y="1368425"/>
+            <a:ext cx="1561465" cy="313690"/>
+          </a:xfrm>
+          <a:prstGeom prst="rect">
+            <a:avLst/>
+          </a:prstGeom>
+          <a:solidFill>
+            <a:srgbClr val="C5DFB2"/>
+          </a:solidFill>
+          <a:ln>
+            <a:solidFill>
+              <a:schemeClr val="tx1"/>
+            </a:solidFill>
+          </a:ln>
+        </p:spPr>
+        <p:style>
+          <a:lnRef idx="2">
+            <a:schemeClr val="accent1">
+              <a:lumMod val="75000"/>
+            </a:schemeClr>
+          </a:lnRef>
+          <a:fillRef idx="1">
+            <a:schemeClr val="accent1"/>
+          </a:fillRef>
+          <a:effectRef idx="0">
+            <a:srgbClr val="FFFFFF"/>
+          </a:effectRef>
+          <a:fontRef idx="minor">
+            <a:schemeClr val="lt1"/>
+          </a:fontRef>
+        </p:style>
+        <p:txBody>
+          <a:bodyPr rtlCol="0" anchor="ctr"/>
+          <a:p>
+            <a:pPr algn="ctr"/>
+            <a:r>
+              <a:rPr lang="zh-CN" altLang="en-US" sz="1600">
                 <a:solidFill>
                   <a:schemeClr val="tx1"/>
                 </a:solidFill>
@@ -3276,451 +3251,451 @@
                 <a:ea typeface="宋体" panose="02010600030101010101" pitchFamily="2" charset="-122"/>
                 <a:cs typeface="Times New Roman" panose="02020603050405020304" charset="0"/>
                 <a:sym typeface="+mn-ea"/>
-              </a:endParaRPr>
-            </a:p>
-          </p:txBody>
-        </p:sp>
-        <p:sp>
-          <p:nvSpPr>
-            <p:cNvPr id="4" name="文本框 3"/>
-            <p:cNvSpPr txBox="1"/>
-            <p:nvPr/>
-          </p:nvSpPr>
-          <p:spPr>
-            <a:xfrm>
-              <a:off x="1287" y="3582"/>
-              <a:ext cx="1677" cy="531"/>
-            </a:xfrm>
-            <a:prstGeom prst="rect">
-              <a:avLst/>
-            </a:prstGeom>
-            <a:noFill/>
-          </p:spPr>
-          <p:txBody>
-            <a:bodyPr wrap="square" rtlCol="0">
-              <a:spAutoFit/>
-            </a:bodyPr>
-            <a:p>
-              <a:r>
-                <a:rPr lang="zh-CN" altLang="en-US" sz="1600" b="1">
-                  <a:solidFill>
-                    <a:schemeClr val="tx1"/>
-                  </a:solidFill>
-                  <a:latin typeface="宋体" panose="02010600030101010101" pitchFamily="2" charset="-122"/>
-                  <a:ea typeface="宋体" panose="02010600030101010101" pitchFamily="2" charset="-122"/>
-                  <a:sym typeface="+mn-ea"/>
-                </a:rPr>
-                <a:t>应用阶段</a:t>
-              </a:r>
-              <a:endParaRPr lang="zh-CN" altLang="en-US" sz="1600" b="1">
+              </a:rPr>
+              <a:t>片段转化</a:t>
+            </a:r>
+            <a:endParaRPr lang="zh-CN" altLang="en-US" sz="1600">
+              <a:solidFill>
+                <a:schemeClr val="tx1"/>
+              </a:solidFill>
+              <a:latin typeface="Times New Roman" panose="02020603050405020304" charset="0"/>
+              <a:ea typeface="宋体" panose="02010600030101010101" pitchFamily="2" charset="-122"/>
+              <a:cs typeface="Times New Roman" panose="02020603050405020304" charset="0"/>
+              <a:sym typeface="+mn-ea"/>
+            </a:endParaRPr>
+          </a:p>
+        </p:txBody>
+      </p:sp>
+      <p:sp>
+        <p:nvSpPr>
+          <p:cNvPr id="4" name="文本框 3"/>
+          <p:cNvSpPr txBox="1"/>
+          <p:nvPr/>
+        </p:nvSpPr>
+        <p:spPr>
+          <a:xfrm>
+            <a:off x="598170" y="956945"/>
+            <a:ext cx="1064895" cy="337185"/>
+          </a:xfrm>
+          <a:prstGeom prst="rect">
+            <a:avLst/>
+          </a:prstGeom>
+          <a:noFill/>
+        </p:spPr>
+        <p:txBody>
+          <a:bodyPr wrap="square" rtlCol="0">
+            <a:spAutoFit/>
+          </a:bodyPr>
+          <a:p>
+            <a:r>
+              <a:rPr lang="zh-CN" altLang="en-US" sz="1600">
                 <a:solidFill>
                   <a:schemeClr val="tx1"/>
                 </a:solidFill>
                 <a:latin typeface="宋体" panose="02010600030101010101" pitchFamily="2" charset="-122"/>
                 <a:ea typeface="宋体" panose="02010600030101010101" pitchFamily="2" charset="-122"/>
                 <a:sym typeface="+mn-ea"/>
-              </a:endParaRPr>
-            </a:p>
-          </p:txBody>
-        </p:sp>
-        <p:sp>
-          <p:nvSpPr>
-            <p:cNvPr id="10" name="矩形 9"/>
-            <p:cNvSpPr/>
-            <p:nvPr/>
-          </p:nvSpPr>
-          <p:spPr>
-            <a:xfrm>
-              <a:off x="776" y="4947"/>
-              <a:ext cx="2459" cy="518"/>
-            </a:xfrm>
-            <a:prstGeom prst="rect">
-              <a:avLst/>
-            </a:prstGeom>
-            <a:solidFill>
-              <a:srgbClr val="BBD6EB"/>
-            </a:solidFill>
-            <a:ln>
+              </a:rPr>
+              <a:t>应用阶段</a:t>
+            </a:r>
+            <a:endParaRPr lang="zh-CN" altLang="en-US" sz="1600">
               <a:solidFill>
                 <a:schemeClr val="tx1"/>
               </a:solidFill>
-            </a:ln>
-          </p:spPr>
-          <p:style>
-            <a:lnRef idx="2">
-              <a:schemeClr val="accent1">
-                <a:lumMod val="75000"/>
-              </a:schemeClr>
-            </a:lnRef>
-            <a:fillRef idx="1">
-              <a:schemeClr val="accent1"/>
-            </a:fillRef>
-            <a:effectRef idx="0">
-              <a:srgbClr val="FFFFFF"/>
-            </a:effectRef>
-            <a:fontRef idx="minor">
-              <a:schemeClr val="lt1"/>
-            </a:fontRef>
-          </p:style>
-          <p:txBody>
-            <a:bodyPr rtlCol="0" anchor="ctr"/>
-            <a:p>
-              <a:pPr algn="ctr"/>
-              <a:r>
-                <a:rPr lang="zh-CN" altLang="en-US" sz="1600" b="1">
-                  <a:solidFill>
-                    <a:schemeClr val="tx1"/>
-                  </a:solidFill>
-                  <a:latin typeface="宋体" panose="02010600030101010101" pitchFamily="2" charset="-122"/>
-                  <a:ea typeface="宋体" panose="02010600030101010101" pitchFamily="2" charset="-122"/>
-                </a:rPr>
-                <a:t>数据预处理</a:t>
-              </a:r>
-              <a:endParaRPr lang="zh-CN" altLang="en-US" sz="1600" b="1">
+              <a:latin typeface="宋体" panose="02010600030101010101" pitchFamily="2" charset="-122"/>
+              <a:ea typeface="宋体" panose="02010600030101010101" pitchFamily="2" charset="-122"/>
+              <a:sym typeface="+mn-ea"/>
+            </a:endParaRPr>
+          </a:p>
+        </p:txBody>
+      </p:sp>
+      <p:sp>
+        <p:nvSpPr>
+          <p:cNvPr id="10" name="矩形 9"/>
+          <p:cNvSpPr/>
+          <p:nvPr/>
+        </p:nvSpPr>
+        <p:spPr>
+          <a:xfrm>
+            <a:off x="273685" y="1823720"/>
+            <a:ext cx="1561465" cy="328930"/>
+          </a:xfrm>
+          <a:prstGeom prst="rect">
+            <a:avLst/>
+          </a:prstGeom>
+          <a:solidFill>
+            <a:srgbClr val="BBD6EB"/>
+          </a:solidFill>
+          <a:ln>
+            <a:solidFill>
+              <a:schemeClr val="tx1"/>
+            </a:solidFill>
+          </a:ln>
+        </p:spPr>
+        <p:style>
+          <a:lnRef idx="2">
+            <a:schemeClr val="accent1">
+              <a:lumMod val="75000"/>
+            </a:schemeClr>
+          </a:lnRef>
+          <a:fillRef idx="1">
+            <a:schemeClr val="accent1"/>
+          </a:fillRef>
+          <a:effectRef idx="0">
+            <a:srgbClr val="FFFFFF"/>
+          </a:effectRef>
+          <a:fontRef idx="minor">
+            <a:schemeClr val="lt1"/>
+          </a:fontRef>
+        </p:style>
+        <p:txBody>
+          <a:bodyPr rtlCol="0" anchor="ctr"/>
+          <a:p>
+            <a:pPr algn="ctr"/>
+            <a:r>
+              <a:rPr lang="zh-CN" altLang="en-US" sz="1600">
                 <a:solidFill>
                   <a:schemeClr val="tx1"/>
                 </a:solidFill>
                 <a:latin typeface="宋体" panose="02010600030101010101" pitchFamily="2" charset="-122"/>
                 <a:ea typeface="宋体" panose="02010600030101010101" pitchFamily="2" charset="-122"/>
-              </a:endParaRPr>
-            </a:p>
-          </p:txBody>
-        </p:sp>
-        <p:sp>
-          <p:nvSpPr>
-            <p:cNvPr id="11" name="矩形 10"/>
-            <p:cNvSpPr/>
-            <p:nvPr/>
-          </p:nvSpPr>
-          <p:spPr>
-            <a:xfrm>
-              <a:off x="776" y="5665"/>
-              <a:ext cx="2459" cy="518"/>
-            </a:xfrm>
-            <a:prstGeom prst="rect">
-              <a:avLst/>
-            </a:prstGeom>
-            <a:solidFill>
-              <a:srgbClr val="BBD6EB"/>
-            </a:solidFill>
-            <a:ln>
+              </a:rPr>
+              <a:t>数据预处理</a:t>
+            </a:r>
+            <a:endParaRPr lang="zh-CN" altLang="en-US" sz="1600">
               <a:solidFill>
                 <a:schemeClr val="tx1"/>
               </a:solidFill>
-            </a:ln>
-          </p:spPr>
-          <p:style>
-            <a:lnRef idx="2">
-              <a:schemeClr val="accent1">
-                <a:lumMod val="75000"/>
-              </a:schemeClr>
-            </a:lnRef>
-            <a:fillRef idx="1">
-              <a:schemeClr val="accent1"/>
-            </a:fillRef>
-            <a:effectRef idx="0">
-              <a:srgbClr val="FFFFFF"/>
-            </a:effectRef>
-            <a:fontRef idx="minor">
-              <a:schemeClr val="lt1"/>
-            </a:fontRef>
-          </p:style>
-          <p:txBody>
-            <a:bodyPr rtlCol="0" anchor="ctr"/>
-            <a:p>
-              <a:pPr algn="ctr"/>
-              <a:r>
-                <a:rPr lang="zh-CN" altLang="en-US" sz="1600" b="1">
-                  <a:solidFill>
-                    <a:schemeClr val="tx1"/>
-                  </a:solidFill>
-                  <a:latin typeface="宋体" panose="02010600030101010101" pitchFamily="2" charset="-122"/>
-                  <a:ea typeface="宋体" panose="02010600030101010101" pitchFamily="2" charset="-122"/>
-                </a:rPr>
-                <a:t>物理仿真更新</a:t>
-              </a:r>
-              <a:endParaRPr lang="zh-CN" altLang="en-US" sz="1600" b="1">
+              <a:latin typeface="宋体" panose="02010600030101010101" pitchFamily="2" charset="-122"/>
+              <a:ea typeface="宋体" panose="02010600030101010101" pitchFamily="2" charset="-122"/>
+            </a:endParaRPr>
+          </a:p>
+        </p:txBody>
+      </p:sp>
+      <p:sp>
+        <p:nvSpPr>
+          <p:cNvPr id="11" name="矩形 10"/>
+          <p:cNvSpPr/>
+          <p:nvPr/>
+        </p:nvSpPr>
+        <p:spPr>
+          <a:xfrm>
+            <a:off x="273685" y="2279650"/>
+            <a:ext cx="1561465" cy="328930"/>
+          </a:xfrm>
+          <a:prstGeom prst="rect">
+            <a:avLst/>
+          </a:prstGeom>
+          <a:solidFill>
+            <a:srgbClr val="BBD6EB"/>
+          </a:solidFill>
+          <a:ln>
+            <a:solidFill>
+              <a:schemeClr val="tx1"/>
+            </a:solidFill>
+          </a:ln>
+        </p:spPr>
+        <p:style>
+          <a:lnRef idx="2">
+            <a:schemeClr val="accent1">
+              <a:lumMod val="75000"/>
+            </a:schemeClr>
+          </a:lnRef>
+          <a:fillRef idx="1">
+            <a:schemeClr val="accent1"/>
+          </a:fillRef>
+          <a:effectRef idx="0">
+            <a:srgbClr val="FFFFFF"/>
+          </a:effectRef>
+          <a:fontRef idx="minor">
+            <a:schemeClr val="lt1"/>
+          </a:fontRef>
+        </p:style>
+        <p:txBody>
+          <a:bodyPr rtlCol="0" anchor="ctr"/>
+          <a:p>
+            <a:pPr algn="ctr"/>
+            <a:r>
+              <a:rPr lang="zh-CN" altLang="en-US" sz="1600">
                 <a:solidFill>
                   <a:schemeClr val="tx1"/>
                 </a:solidFill>
                 <a:latin typeface="宋体" panose="02010600030101010101" pitchFamily="2" charset="-122"/>
                 <a:ea typeface="宋体" panose="02010600030101010101" pitchFamily="2" charset="-122"/>
-              </a:endParaRPr>
-            </a:p>
-          </p:txBody>
-        </p:sp>
-        <p:sp>
-          <p:nvSpPr>
-            <p:cNvPr id="12" name="文本框 11"/>
-            <p:cNvSpPr txBox="1"/>
-            <p:nvPr/>
-          </p:nvSpPr>
-          <p:spPr>
-            <a:xfrm>
-              <a:off x="1516" y="6347"/>
-              <a:ext cx="1677" cy="531"/>
-            </a:xfrm>
-            <a:prstGeom prst="rect">
-              <a:avLst/>
-            </a:prstGeom>
-            <a:noFill/>
-          </p:spPr>
-          <p:txBody>
-            <a:bodyPr wrap="square" rtlCol="0">
-              <a:spAutoFit/>
-            </a:bodyPr>
-            <a:p>
-              <a:r>
-                <a:rPr lang="en-US" altLang="zh-CN" sz="1600" b="1">
-                  <a:solidFill>
-                    <a:schemeClr val="tx1"/>
-                  </a:solidFill>
-                  <a:latin typeface="宋体" panose="02010600030101010101" pitchFamily="2" charset="-122"/>
-                  <a:ea typeface="宋体" panose="02010600030101010101" pitchFamily="2" charset="-122"/>
-                  <a:sym typeface="+mn-ea"/>
-                </a:rPr>
-                <a:t>……</a:t>
-              </a:r>
-              <a:endParaRPr lang="en-US" altLang="zh-CN" sz="1600" b="1">
+              </a:rPr>
+              <a:t>物理仿真更新</a:t>
+            </a:r>
+            <a:endParaRPr lang="zh-CN" altLang="en-US" sz="1600">
+              <a:solidFill>
+                <a:schemeClr val="tx1"/>
+              </a:solidFill>
+              <a:latin typeface="宋体" panose="02010600030101010101" pitchFamily="2" charset="-122"/>
+              <a:ea typeface="宋体" panose="02010600030101010101" pitchFamily="2" charset="-122"/>
+            </a:endParaRPr>
+          </a:p>
+        </p:txBody>
+      </p:sp>
+      <p:sp>
+        <p:nvSpPr>
+          <p:cNvPr id="12" name="文本框 11"/>
+          <p:cNvSpPr txBox="1"/>
+          <p:nvPr/>
+        </p:nvSpPr>
+        <p:spPr>
+          <a:xfrm>
+            <a:off x="743585" y="2712720"/>
+            <a:ext cx="1064895" cy="337185"/>
+          </a:xfrm>
+          <a:prstGeom prst="rect">
+            <a:avLst/>
+          </a:prstGeom>
+          <a:noFill/>
+        </p:spPr>
+        <p:txBody>
+          <a:bodyPr wrap="square" rtlCol="0">
+            <a:spAutoFit/>
+          </a:bodyPr>
+          <a:p>
+            <a:r>
+              <a:rPr lang="en-US" altLang="zh-CN" sz="1600">
                 <a:solidFill>
                   <a:schemeClr val="tx1"/>
                 </a:solidFill>
                 <a:latin typeface="宋体" panose="02010600030101010101" pitchFamily="2" charset="-122"/>
                 <a:ea typeface="宋体" panose="02010600030101010101" pitchFamily="2" charset="-122"/>
                 <a:sym typeface="+mn-ea"/>
-              </a:endParaRPr>
-            </a:p>
-          </p:txBody>
-        </p:sp>
-        <p:sp>
-          <p:nvSpPr>
-            <p:cNvPr id="18" name="矩形 17"/>
-            <p:cNvSpPr/>
-            <p:nvPr/>
-          </p:nvSpPr>
-          <p:spPr>
-            <a:xfrm>
-              <a:off x="6020" y="4944"/>
-              <a:ext cx="2459" cy="518"/>
-            </a:xfrm>
-            <a:prstGeom prst="rect">
-              <a:avLst/>
-            </a:prstGeom>
-            <a:solidFill>
-              <a:srgbClr val="F7CAAB"/>
-            </a:solidFill>
-            <a:ln>
+              </a:rPr>
+              <a:t>……</a:t>
+            </a:r>
+            <a:endParaRPr lang="en-US" altLang="zh-CN" sz="1600">
               <a:solidFill>
                 <a:schemeClr val="tx1"/>
               </a:solidFill>
-            </a:ln>
-          </p:spPr>
-          <p:style>
-            <a:lnRef idx="2">
-              <a:schemeClr val="accent1">
-                <a:lumMod val="75000"/>
-              </a:schemeClr>
-            </a:lnRef>
-            <a:fillRef idx="1">
-              <a:schemeClr val="accent1"/>
-            </a:fillRef>
-            <a:effectRef idx="0">
-              <a:srgbClr val="FFFFFF"/>
-            </a:effectRef>
-            <a:fontRef idx="minor">
-              <a:schemeClr val="lt1"/>
-            </a:fontRef>
-          </p:style>
-          <p:txBody>
-            <a:bodyPr rtlCol="0" anchor="ctr"/>
-            <a:p>
-              <a:pPr algn="ctr"/>
-              <a:r>
-                <a:rPr lang="zh-CN" altLang="en-US" sz="1600" b="1">
-                  <a:solidFill>
-                    <a:schemeClr val="tx1"/>
-                  </a:solidFill>
-                  <a:latin typeface="宋体" panose="02010600030101010101" pitchFamily="2" charset="-122"/>
-                  <a:ea typeface="宋体" panose="02010600030101010101" pitchFamily="2" charset="-122"/>
-                  <a:cs typeface="宋体" panose="02010600030101010101" pitchFamily="2" charset="-122"/>
-                </a:rPr>
-                <a:t>几何着色</a:t>
-              </a:r>
-              <a:endParaRPr lang="zh-CN" altLang="en-US" sz="1600" b="1">
+              <a:latin typeface="宋体" panose="02010600030101010101" pitchFamily="2" charset="-122"/>
+              <a:ea typeface="宋体" panose="02010600030101010101" pitchFamily="2" charset="-122"/>
+              <a:sym typeface="+mn-ea"/>
+            </a:endParaRPr>
+          </a:p>
+        </p:txBody>
+      </p:sp>
+      <p:sp>
+        <p:nvSpPr>
+          <p:cNvPr id="18" name="矩形 17"/>
+          <p:cNvSpPr/>
+          <p:nvPr/>
+        </p:nvSpPr>
+        <p:spPr>
+          <a:xfrm>
+            <a:off x="3603625" y="1821815"/>
+            <a:ext cx="1561465" cy="328930"/>
+          </a:xfrm>
+          <a:prstGeom prst="rect">
+            <a:avLst/>
+          </a:prstGeom>
+          <a:solidFill>
+            <a:srgbClr val="F7CAAB"/>
+          </a:solidFill>
+          <a:ln>
+            <a:solidFill>
+              <a:schemeClr val="tx1"/>
+            </a:solidFill>
+          </a:ln>
+        </p:spPr>
+        <p:style>
+          <a:lnRef idx="2">
+            <a:schemeClr val="accent1">
+              <a:lumMod val="75000"/>
+            </a:schemeClr>
+          </a:lnRef>
+          <a:fillRef idx="1">
+            <a:schemeClr val="accent1"/>
+          </a:fillRef>
+          <a:effectRef idx="0">
+            <a:srgbClr val="FFFFFF"/>
+          </a:effectRef>
+          <a:fontRef idx="minor">
+            <a:schemeClr val="lt1"/>
+          </a:fontRef>
+        </p:style>
+        <p:txBody>
+          <a:bodyPr rtlCol="0" anchor="ctr"/>
+          <a:p>
+            <a:pPr algn="ctr"/>
+            <a:r>
+              <a:rPr lang="zh-CN" altLang="en-US" sz="1600">
                 <a:solidFill>
                   <a:schemeClr val="tx1"/>
                 </a:solidFill>
                 <a:latin typeface="宋体" panose="02010600030101010101" pitchFamily="2" charset="-122"/>
                 <a:ea typeface="宋体" panose="02010600030101010101" pitchFamily="2" charset="-122"/>
                 <a:cs typeface="宋体" panose="02010600030101010101" pitchFamily="2" charset="-122"/>
-              </a:endParaRPr>
-            </a:p>
-          </p:txBody>
-        </p:sp>
-        <p:sp>
-          <p:nvSpPr>
-            <p:cNvPr id="19" name="矩形 18"/>
-            <p:cNvSpPr/>
-            <p:nvPr/>
-          </p:nvSpPr>
-          <p:spPr>
-            <a:xfrm>
-              <a:off x="6020" y="5668"/>
-              <a:ext cx="2459" cy="518"/>
-            </a:xfrm>
-            <a:prstGeom prst="rect">
-              <a:avLst/>
-            </a:prstGeom>
-            <a:solidFill>
-              <a:srgbClr val="F7CAAB"/>
-            </a:solidFill>
-            <a:ln>
+              </a:rPr>
+              <a:t>几何着色</a:t>
+            </a:r>
+            <a:endParaRPr lang="zh-CN" altLang="en-US" sz="1600">
               <a:solidFill>
                 <a:schemeClr val="tx1"/>
               </a:solidFill>
-            </a:ln>
-          </p:spPr>
-          <p:style>
-            <a:lnRef idx="2">
-              <a:schemeClr val="accent1">
-                <a:lumMod val="75000"/>
-              </a:schemeClr>
-            </a:lnRef>
-            <a:fillRef idx="1">
-              <a:schemeClr val="accent1"/>
-            </a:fillRef>
-            <a:effectRef idx="0">
-              <a:srgbClr val="FFFFFF"/>
-            </a:effectRef>
-            <a:fontRef idx="minor">
-              <a:schemeClr val="lt1"/>
-            </a:fontRef>
-          </p:style>
-          <p:txBody>
-            <a:bodyPr rtlCol="0" anchor="ctr"/>
-            <a:p>
-              <a:pPr algn="ctr"/>
-              <a:r>
-                <a:rPr lang="zh-CN" altLang="en-US" sz="1600" b="1">
-                  <a:solidFill>
-                    <a:schemeClr val="tx1"/>
-                  </a:solidFill>
-                  <a:latin typeface="宋体" panose="02010600030101010101" pitchFamily="2" charset="-122"/>
-                  <a:ea typeface="宋体" panose="02010600030101010101" pitchFamily="2" charset="-122"/>
-                  <a:cs typeface="宋体" panose="02010600030101010101" pitchFamily="2" charset="-122"/>
-                </a:rPr>
-                <a:t>裁剪投影</a:t>
-              </a:r>
-              <a:endParaRPr lang="zh-CN" altLang="en-US" sz="1600" b="1">
+              <a:latin typeface="宋体" panose="02010600030101010101" pitchFamily="2" charset="-122"/>
+              <a:ea typeface="宋体" panose="02010600030101010101" pitchFamily="2" charset="-122"/>
+              <a:cs typeface="宋体" panose="02010600030101010101" pitchFamily="2" charset="-122"/>
+            </a:endParaRPr>
+          </a:p>
+        </p:txBody>
+      </p:sp>
+      <p:sp>
+        <p:nvSpPr>
+          <p:cNvPr id="19" name="矩形 18"/>
+          <p:cNvSpPr/>
+          <p:nvPr/>
+        </p:nvSpPr>
+        <p:spPr>
+          <a:xfrm>
+            <a:off x="3603625" y="2281555"/>
+            <a:ext cx="1561465" cy="328930"/>
+          </a:xfrm>
+          <a:prstGeom prst="rect">
+            <a:avLst/>
+          </a:prstGeom>
+          <a:solidFill>
+            <a:srgbClr val="F7CAAB"/>
+          </a:solidFill>
+          <a:ln>
+            <a:solidFill>
+              <a:schemeClr val="tx1"/>
+            </a:solidFill>
+          </a:ln>
+        </p:spPr>
+        <p:style>
+          <a:lnRef idx="2">
+            <a:schemeClr val="accent1">
+              <a:lumMod val="75000"/>
+            </a:schemeClr>
+          </a:lnRef>
+          <a:fillRef idx="1">
+            <a:schemeClr val="accent1"/>
+          </a:fillRef>
+          <a:effectRef idx="0">
+            <a:srgbClr val="FFFFFF"/>
+          </a:effectRef>
+          <a:fontRef idx="minor">
+            <a:schemeClr val="lt1"/>
+          </a:fontRef>
+        </p:style>
+        <p:txBody>
+          <a:bodyPr rtlCol="0" anchor="ctr"/>
+          <a:p>
+            <a:pPr algn="ctr"/>
+            <a:r>
+              <a:rPr lang="zh-CN" altLang="en-US" sz="1600">
                 <a:solidFill>
                   <a:schemeClr val="tx1"/>
                 </a:solidFill>
                 <a:latin typeface="宋体" panose="02010600030101010101" pitchFamily="2" charset="-122"/>
                 <a:ea typeface="宋体" panose="02010600030101010101" pitchFamily="2" charset="-122"/>
                 <a:cs typeface="宋体" panose="02010600030101010101" pitchFamily="2" charset="-122"/>
-              </a:endParaRPr>
-            </a:p>
-          </p:txBody>
-        </p:sp>
-        <p:sp>
-          <p:nvSpPr>
-            <p:cNvPr id="21" name="文本框 20"/>
-            <p:cNvSpPr txBox="1"/>
-            <p:nvPr/>
-          </p:nvSpPr>
-          <p:spPr>
-            <a:xfrm>
-              <a:off x="6802" y="6316"/>
-              <a:ext cx="1677" cy="531"/>
-            </a:xfrm>
-            <a:prstGeom prst="rect">
-              <a:avLst/>
-            </a:prstGeom>
-            <a:noFill/>
-          </p:spPr>
-          <p:txBody>
-            <a:bodyPr wrap="square" rtlCol="0">
-              <a:spAutoFit/>
-            </a:bodyPr>
-            <a:p>
-              <a:r>
-                <a:rPr lang="en-US" altLang="zh-CN" sz="1600" b="1">
-                  <a:solidFill>
-                    <a:schemeClr val="tx1"/>
-                  </a:solidFill>
-                  <a:latin typeface="宋体" panose="02010600030101010101" pitchFamily="2" charset="-122"/>
-                  <a:ea typeface="宋体" panose="02010600030101010101" pitchFamily="2" charset="-122"/>
-                  <a:sym typeface="+mn-ea"/>
-                </a:rPr>
-                <a:t>……</a:t>
-              </a:r>
-              <a:endParaRPr lang="en-US" altLang="zh-CN" sz="1600" b="1">
+              </a:rPr>
+              <a:t>裁剪投影</a:t>
+            </a:r>
+            <a:endParaRPr lang="zh-CN" altLang="en-US" sz="1600">
+              <a:solidFill>
+                <a:schemeClr val="tx1"/>
+              </a:solidFill>
+              <a:latin typeface="宋体" panose="02010600030101010101" pitchFamily="2" charset="-122"/>
+              <a:ea typeface="宋体" panose="02010600030101010101" pitchFamily="2" charset="-122"/>
+              <a:cs typeface="宋体" panose="02010600030101010101" pitchFamily="2" charset="-122"/>
+            </a:endParaRPr>
+          </a:p>
+        </p:txBody>
+      </p:sp>
+      <p:sp>
+        <p:nvSpPr>
+          <p:cNvPr id="21" name="文本框 20"/>
+          <p:cNvSpPr txBox="1"/>
+          <p:nvPr/>
+        </p:nvSpPr>
+        <p:spPr>
+          <a:xfrm>
+            <a:off x="4100195" y="2693035"/>
+            <a:ext cx="1064895" cy="337185"/>
+          </a:xfrm>
+          <a:prstGeom prst="rect">
+            <a:avLst/>
+          </a:prstGeom>
+          <a:noFill/>
+        </p:spPr>
+        <p:txBody>
+          <a:bodyPr wrap="square" rtlCol="0">
+            <a:spAutoFit/>
+          </a:bodyPr>
+          <a:p>
+            <a:r>
+              <a:rPr lang="en-US" altLang="zh-CN" sz="1600">
                 <a:solidFill>
                   <a:schemeClr val="tx1"/>
                 </a:solidFill>
                 <a:latin typeface="宋体" panose="02010600030101010101" pitchFamily="2" charset="-122"/>
                 <a:ea typeface="宋体" panose="02010600030101010101" pitchFamily="2" charset="-122"/>
                 <a:sym typeface="+mn-ea"/>
-              </a:endParaRPr>
-            </a:p>
-          </p:txBody>
-        </p:sp>
-        <p:sp>
-          <p:nvSpPr>
-            <p:cNvPr id="29" name="矩形 28"/>
-            <p:cNvSpPr/>
-            <p:nvPr/>
-          </p:nvSpPr>
-          <p:spPr>
-            <a:xfrm>
-              <a:off x="11378" y="4924"/>
-              <a:ext cx="2459" cy="494"/>
-            </a:xfrm>
-            <a:prstGeom prst="rect">
-              <a:avLst/>
-            </a:prstGeom>
-            <a:solidFill>
-              <a:srgbClr val="C5DFB2"/>
-            </a:solidFill>
-            <a:ln>
+              </a:rPr>
+              <a:t>……</a:t>
+            </a:r>
+            <a:endParaRPr lang="en-US" altLang="zh-CN" sz="1600">
               <a:solidFill>
                 <a:schemeClr val="tx1"/>
               </a:solidFill>
-            </a:ln>
-          </p:spPr>
-          <p:style>
-            <a:lnRef idx="2">
-              <a:schemeClr val="accent1">
-                <a:lumMod val="75000"/>
-              </a:schemeClr>
-            </a:lnRef>
-            <a:fillRef idx="1">
-              <a:schemeClr val="accent1"/>
-            </a:fillRef>
-            <a:effectRef idx="0">
-              <a:srgbClr val="FFFFFF"/>
-            </a:effectRef>
-            <a:fontRef idx="minor">
-              <a:schemeClr val="lt1"/>
-            </a:fontRef>
-          </p:style>
-          <p:txBody>
-            <a:bodyPr rtlCol="0" anchor="ctr"/>
-            <a:p>
-              <a:pPr algn="ctr"/>
-              <a:r>
-                <a:rPr lang="zh-CN" altLang="en-US" sz="1600" b="1">
-                  <a:solidFill>
-                    <a:schemeClr val="tx1"/>
-                  </a:solidFill>
-                  <a:latin typeface="Times New Roman" panose="02020603050405020304" charset="0"/>
-                  <a:ea typeface="宋体" panose="02010600030101010101" pitchFamily="2" charset="-122"/>
-                  <a:cs typeface="Times New Roman" panose="02020603050405020304" charset="0"/>
-                  <a:sym typeface="+mn-ea"/>
-                </a:rPr>
-                <a:t>像素着色</a:t>
-              </a:r>
-              <a:endParaRPr lang="zh-CN" altLang="en-US" sz="1600" b="1">
+              <a:latin typeface="宋体" panose="02010600030101010101" pitchFamily="2" charset="-122"/>
+              <a:ea typeface="宋体" panose="02010600030101010101" pitchFamily="2" charset="-122"/>
+              <a:sym typeface="+mn-ea"/>
+            </a:endParaRPr>
+          </a:p>
+        </p:txBody>
+      </p:sp>
+      <p:sp>
+        <p:nvSpPr>
+          <p:cNvPr id="29" name="矩形 28"/>
+          <p:cNvSpPr/>
+          <p:nvPr/>
+        </p:nvSpPr>
+        <p:spPr>
+          <a:xfrm>
+            <a:off x="7005955" y="1809115"/>
+            <a:ext cx="1561465" cy="313690"/>
+          </a:xfrm>
+          <a:prstGeom prst="rect">
+            <a:avLst/>
+          </a:prstGeom>
+          <a:solidFill>
+            <a:srgbClr val="C5DFB2"/>
+          </a:solidFill>
+          <a:ln>
+            <a:solidFill>
+              <a:schemeClr val="tx1"/>
+            </a:solidFill>
+          </a:ln>
+        </p:spPr>
+        <p:style>
+          <a:lnRef idx="2">
+            <a:schemeClr val="accent1">
+              <a:lumMod val="75000"/>
+            </a:schemeClr>
+          </a:lnRef>
+          <a:fillRef idx="1">
+            <a:schemeClr val="accent1"/>
+          </a:fillRef>
+          <a:effectRef idx="0">
+            <a:srgbClr val="FFFFFF"/>
+          </a:effectRef>
+          <a:fontRef idx="minor">
+            <a:schemeClr val="lt1"/>
+          </a:fontRef>
+        </p:style>
+        <p:txBody>
+          <a:bodyPr rtlCol="0" anchor="ctr"/>
+          <a:p>
+            <a:pPr algn="ctr"/>
+            <a:r>
+              <a:rPr lang="zh-CN" altLang="en-US" sz="1600">
                 <a:solidFill>
                   <a:schemeClr val="tx1"/>
                 </a:solidFill>
@@ -3728,66 +3703,66 @@
                 <a:ea typeface="宋体" panose="02010600030101010101" pitchFamily="2" charset="-122"/>
                 <a:cs typeface="Times New Roman" panose="02020603050405020304" charset="0"/>
                 <a:sym typeface="+mn-ea"/>
-              </a:endParaRPr>
-            </a:p>
-          </p:txBody>
-        </p:sp>
-        <p:sp>
-          <p:nvSpPr>
-            <p:cNvPr id="31" name="矩形 30"/>
-            <p:cNvSpPr/>
-            <p:nvPr/>
-          </p:nvSpPr>
-          <p:spPr>
-            <a:xfrm>
-              <a:off x="11378" y="5661"/>
-              <a:ext cx="2459" cy="494"/>
-            </a:xfrm>
-            <a:prstGeom prst="rect">
-              <a:avLst/>
-            </a:prstGeom>
-            <a:solidFill>
-              <a:srgbClr val="C5DFB2"/>
-            </a:solidFill>
-            <a:ln>
+              </a:rPr>
+              <a:t>像素着色</a:t>
+            </a:r>
+            <a:endParaRPr lang="zh-CN" altLang="en-US" sz="1600">
               <a:solidFill>
                 <a:schemeClr val="tx1"/>
               </a:solidFill>
-            </a:ln>
-          </p:spPr>
-          <p:style>
-            <a:lnRef idx="2">
-              <a:schemeClr val="accent1">
-                <a:lumMod val="75000"/>
-              </a:schemeClr>
-            </a:lnRef>
-            <a:fillRef idx="1">
-              <a:schemeClr val="accent1"/>
-            </a:fillRef>
-            <a:effectRef idx="0">
-              <a:srgbClr val="FFFFFF"/>
-            </a:effectRef>
-            <a:fontRef idx="minor">
-              <a:schemeClr val="lt1"/>
-            </a:fontRef>
-          </p:style>
-          <p:txBody>
-            <a:bodyPr rtlCol="0" anchor="ctr"/>
-            <a:p>
-              <a:pPr algn="ctr"/>
-              <a:r>
-                <a:rPr lang="zh-CN" altLang="en-US" sz="1600" b="1">
-                  <a:solidFill>
-                    <a:schemeClr val="tx1"/>
-                  </a:solidFill>
-                  <a:latin typeface="Times New Roman" panose="02020603050405020304" charset="0"/>
-                  <a:ea typeface="宋体" panose="02010600030101010101" pitchFamily="2" charset="-122"/>
-                  <a:cs typeface="Times New Roman" panose="02020603050405020304" charset="0"/>
-                  <a:sym typeface="+mn-ea"/>
-                </a:rPr>
-                <a:t>深度测试</a:t>
-              </a:r>
-              <a:endParaRPr lang="zh-CN" altLang="en-US" sz="1600" b="1">
+              <a:latin typeface="Times New Roman" panose="02020603050405020304" charset="0"/>
+              <a:ea typeface="宋体" panose="02010600030101010101" pitchFamily="2" charset="-122"/>
+              <a:cs typeface="Times New Roman" panose="02020603050405020304" charset="0"/>
+              <a:sym typeface="+mn-ea"/>
+            </a:endParaRPr>
+          </a:p>
+        </p:txBody>
+      </p:sp>
+      <p:sp>
+        <p:nvSpPr>
+          <p:cNvPr id="31" name="矩形 30"/>
+          <p:cNvSpPr/>
+          <p:nvPr/>
+        </p:nvSpPr>
+        <p:spPr>
+          <a:xfrm>
+            <a:off x="7005955" y="2277110"/>
+            <a:ext cx="1561465" cy="313690"/>
+          </a:xfrm>
+          <a:prstGeom prst="rect">
+            <a:avLst/>
+          </a:prstGeom>
+          <a:solidFill>
+            <a:srgbClr val="C5DFB2"/>
+          </a:solidFill>
+          <a:ln>
+            <a:solidFill>
+              <a:schemeClr val="tx1"/>
+            </a:solidFill>
+          </a:ln>
+        </p:spPr>
+        <p:style>
+          <a:lnRef idx="2">
+            <a:schemeClr val="accent1">
+              <a:lumMod val="75000"/>
+            </a:schemeClr>
+          </a:lnRef>
+          <a:fillRef idx="1">
+            <a:schemeClr val="accent1"/>
+          </a:fillRef>
+          <a:effectRef idx="0">
+            <a:srgbClr val="FFFFFF"/>
+          </a:effectRef>
+          <a:fontRef idx="minor">
+            <a:schemeClr val="lt1"/>
+          </a:fontRef>
+        </p:style>
+        <p:txBody>
+          <a:bodyPr rtlCol="0" anchor="ctr"/>
+          <a:p>
+            <a:pPr algn="ctr"/>
+            <a:r>
+              <a:rPr lang="zh-CN" altLang="en-US" sz="1600">
                 <a:solidFill>
                   <a:schemeClr val="tx1"/>
                 </a:solidFill>
@@ -3795,490 +3770,500 @@
                 <a:ea typeface="宋体" panose="02010600030101010101" pitchFamily="2" charset="-122"/>
                 <a:cs typeface="Times New Roman" panose="02020603050405020304" charset="0"/>
                 <a:sym typeface="+mn-ea"/>
-              </a:endParaRPr>
-            </a:p>
-          </p:txBody>
-        </p:sp>
-        <p:sp>
-          <p:nvSpPr>
-            <p:cNvPr id="33" name="文本框 32"/>
-            <p:cNvSpPr txBox="1"/>
-            <p:nvPr/>
-          </p:nvSpPr>
-          <p:spPr>
-            <a:xfrm>
-              <a:off x="12160" y="6303"/>
-              <a:ext cx="1677" cy="531"/>
-            </a:xfrm>
-            <a:prstGeom prst="rect">
-              <a:avLst/>
-            </a:prstGeom>
-            <a:noFill/>
-          </p:spPr>
-          <p:txBody>
-            <a:bodyPr wrap="square" rtlCol="0">
-              <a:spAutoFit/>
-            </a:bodyPr>
-            <a:p>
-              <a:r>
-                <a:rPr lang="en-US" altLang="zh-CN" sz="1600" b="1">
-                  <a:solidFill>
-                    <a:schemeClr val="tx1"/>
-                  </a:solidFill>
-                  <a:latin typeface="宋体" panose="02010600030101010101" pitchFamily="2" charset="-122"/>
-                  <a:ea typeface="宋体" panose="02010600030101010101" pitchFamily="2" charset="-122"/>
-                  <a:sym typeface="+mn-ea"/>
-                </a:rPr>
-                <a:t>……</a:t>
-              </a:r>
-              <a:endParaRPr lang="en-US" altLang="zh-CN" sz="1600" b="1">
+              </a:rPr>
+              <a:t>深度测试</a:t>
+            </a:r>
+            <a:endParaRPr lang="zh-CN" altLang="en-US" sz="1600">
+              <a:solidFill>
+                <a:schemeClr val="tx1"/>
+              </a:solidFill>
+              <a:latin typeface="Times New Roman" panose="02020603050405020304" charset="0"/>
+              <a:ea typeface="宋体" panose="02010600030101010101" pitchFamily="2" charset="-122"/>
+              <a:cs typeface="Times New Roman" panose="02020603050405020304" charset="0"/>
+              <a:sym typeface="+mn-ea"/>
+            </a:endParaRPr>
+          </a:p>
+        </p:txBody>
+      </p:sp>
+      <p:sp>
+        <p:nvSpPr>
+          <p:cNvPr id="33" name="文本框 32"/>
+          <p:cNvSpPr txBox="1"/>
+          <p:nvPr/>
+        </p:nvSpPr>
+        <p:spPr>
+          <a:xfrm>
+            <a:off x="7502525" y="2684780"/>
+            <a:ext cx="1064895" cy="337185"/>
+          </a:xfrm>
+          <a:prstGeom prst="rect">
+            <a:avLst/>
+          </a:prstGeom>
+          <a:noFill/>
+        </p:spPr>
+        <p:txBody>
+          <a:bodyPr wrap="square" rtlCol="0">
+            <a:spAutoFit/>
+          </a:bodyPr>
+          <a:p>
+            <a:r>
+              <a:rPr lang="en-US" altLang="zh-CN" sz="1600">
                 <a:solidFill>
                   <a:schemeClr val="tx1"/>
                 </a:solidFill>
                 <a:latin typeface="宋体" panose="02010600030101010101" pitchFamily="2" charset="-122"/>
                 <a:ea typeface="宋体" panose="02010600030101010101" pitchFamily="2" charset="-122"/>
                 <a:sym typeface="+mn-ea"/>
-              </a:endParaRPr>
-            </a:p>
-          </p:txBody>
-        </p:sp>
-        <p:cxnSp>
-          <p:nvCxnSpPr>
-            <p:cNvPr id="35" name="直接箭头连接符 34"/>
-            <p:cNvCxnSpPr>
-              <a:stCxn id="5" idx="3"/>
-              <a:endCxn id="27" idx="1"/>
-            </p:cNvCxnSpPr>
-            <p:nvPr/>
-          </p:nvCxnSpPr>
-          <p:spPr>
-            <a:xfrm flipV="1">
-              <a:off x="3553" y="5265"/>
-              <a:ext cx="2155" cy="2"/>
-            </a:xfrm>
-            <a:prstGeom prst="straightConnector1">
-              <a:avLst/>
-            </a:prstGeom>
-            <a:ln w="19050">
+              </a:rPr>
+              <a:t>……</a:t>
+            </a:r>
+            <a:endParaRPr lang="en-US" altLang="zh-CN" sz="1600">
               <a:solidFill>
                 <a:schemeClr val="tx1"/>
               </a:solidFill>
-              <a:headEnd type="none"/>
-              <a:tailEnd type="triangle" w="med" len="med"/>
-            </a:ln>
-          </p:spPr>
-          <p:style>
-            <a:lnRef idx="2">
-              <a:schemeClr val="accent1"/>
-            </a:lnRef>
-            <a:fillRef idx="0">
-              <a:srgbClr val="FFFFFF"/>
-            </a:fillRef>
-            <a:effectRef idx="0">
-              <a:srgbClr val="FFFFFF"/>
-            </a:effectRef>
-            <a:fontRef idx="minor">
+              <a:latin typeface="宋体" panose="02010600030101010101" pitchFamily="2" charset="-122"/>
+              <a:ea typeface="宋体" panose="02010600030101010101" pitchFamily="2" charset="-122"/>
+              <a:sym typeface="+mn-ea"/>
+            </a:endParaRPr>
+          </a:p>
+        </p:txBody>
+      </p:sp>
+      <p:cxnSp>
+        <p:nvCxnSpPr>
+          <p:cNvPr id="35" name="直接箭头连接符 34"/>
+          <p:cNvCxnSpPr>
+            <a:stCxn id="5" idx="3"/>
+            <a:endCxn id="27" idx="1"/>
+          </p:cNvCxnSpPr>
+          <p:nvPr/>
+        </p:nvCxnSpPr>
+        <p:spPr>
+          <a:xfrm flipV="1">
+            <a:off x="2037080" y="2025650"/>
+            <a:ext cx="1368425" cy="1270"/>
+          </a:xfrm>
+          <a:prstGeom prst="straightConnector1">
+            <a:avLst/>
+          </a:prstGeom>
+          <a:ln w="19050">
+            <a:solidFill>
               <a:schemeClr val="tx1"/>
-            </a:fontRef>
-          </p:style>
-        </p:cxnSp>
-        <p:cxnSp>
-          <p:nvCxnSpPr>
-            <p:cNvPr id="36" name="直接箭头连接符 35"/>
-            <p:cNvCxnSpPr/>
-            <p:nvPr/>
-          </p:nvCxnSpPr>
-          <p:spPr>
-            <a:xfrm>
-              <a:off x="8812" y="5265"/>
-              <a:ext cx="2155" cy="1"/>
-            </a:xfrm>
-            <a:prstGeom prst="straightConnector1">
-              <a:avLst/>
-            </a:prstGeom>
-            <a:ln w="19050">
-              <a:solidFill>
-                <a:schemeClr val="tx1"/>
-              </a:solidFill>
-              <a:headEnd type="none"/>
-              <a:tailEnd type="triangle" w="med" len="med"/>
-            </a:ln>
-          </p:spPr>
-          <p:style>
-            <a:lnRef idx="2">
-              <a:schemeClr val="accent1"/>
-            </a:lnRef>
-            <a:fillRef idx="0">
-              <a:srgbClr val="FFFFFF"/>
-            </a:fillRef>
-            <a:effectRef idx="0">
-              <a:srgbClr val="FFFFFF"/>
-            </a:effectRef>
-            <a:fontRef idx="minor">
+            </a:solidFill>
+            <a:headEnd type="none"/>
+            <a:tailEnd type="triangle" w="med" len="med"/>
+          </a:ln>
+        </p:spPr>
+        <p:style>
+          <a:lnRef idx="2">
+            <a:schemeClr val="accent1"/>
+          </a:lnRef>
+          <a:fillRef idx="0">
+            <a:srgbClr val="FFFFFF"/>
+          </a:fillRef>
+          <a:effectRef idx="0">
+            <a:srgbClr val="FFFFFF"/>
+          </a:effectRef>
+          <a:fontRef idx="minor">
+            <a:schemeClr val="tx1"/>
+          </a:fontRef>
+        </p:style>
+      </p:cxnSp>
+      <p:cxnSp>
+        <p:nvCxnSpPr>
+          <p:cNvPr id="36" name="直接箭头连接符 35"/>
+          <p:cNvCxnSpPr/>
+          <p:nvPr/>
+        </p:nvCxnSpPr>
+        <p:spPr>
+          <a:xfrm>
+            <a:off x="5376545" y="2025650"/>
+            <a:ext cx="1368425" cy="635"/>
+          </a:xfrm>
+          <a:prstGeom prst="straightConnector1">
+            <a:avLst/>
+          </a:prstGeom>
+          <a:ln w="19050">
+            <a:solidFill>
               <a:schemeClr val="tx1"/>
-            </a:fontRef>
-          </p:style>
-        </p:cxnSp>
-        <p:sp>
-          <p:nvSpPr>
-            <p:cNvPr id="43" name="文本框 42"/>
-            <p:cNvSpPr txBox="1"/>
-            <p:nvPr/>
-          </p:nvSpPr>
-          <p:spPr>
-            <a:xfrm>
-              <a:off x="6567" y="3626"/>
-              <a:ext cx="1677" cy="531"/>
-            </a:xfrm>
-            <a:prstGeom prst="rect">
-              <a:avLst/>
-            </a:prstGeom>
-            <a:noFill/>
-          </p:spPr>
-          <p:txBody>
-            <a:bodyPr wrap="square" rtlCol="0">
-              <a:spAutoFit/>
-            </a:bodyPr>
-            <a:p>
-              <a:r>
-                <a:rPr lang="zh-CN" altLang="en-US" sz="1600" b="1">
-                  <a:solidFill>
-                    <a:schemeClr val="tx1"/>
-                  </a:solidFill>
-                  <a:latin typeface="宋体" panose="02010600030101010101" pitchFamily="2" charset="-122"/>
-                  <a:ea typeface="宋体" panose="02010600030101010101" pitchFamily="2" charset="-122"/>
-                  <a:sym typeface="+mn-ea"/>
-                </a:rPr>
-                <a:t>几何阶段</a:t>
-              </a:r>
-              <a:endParaRPr lang="zh-CN" altLang="en-US" sz="1600" b="1">
+            </a:solidFill>
+            <a:headEnd type="none"/>
+            <a:tailEnd type="triangle" w="med" len="med"/>
+          </a:ln>
+        </p:spPr>
+        <p:style>
+          <a:lnRef idx="2">
+            <a:schemeClr val="accent1"/>
+          </a:lnRef>
+          <a:fillRef idx="0">
+            <a:srgbClr val="FFFFFF"/>
+          </a:fillRef>
+          <a:effectRef idx="0">
+            <a:srgbClr val="FFFFFF"/>
+          </a:effectRef>
+          <a:fontRef idx="minor">
+            <a:schemeClr val="tx1"/>
+          </a:fontRef>
+        </p:style>
+      </p:cxnSp>
+      <p:sp>
+        <p:nvSpPr>
+          <p:cNvPr id="43" name="文本框 42"/>
+          <p:cNvSpPr txBox="1"/>
+          <p:nvPr/>
+        </p:nvSpPr>
+        <p:spPr>
+          <a:xfrm>
+            <a:off x="3950970" y="984885"/>
+            <a:ext cx="1064895" cy="337185"/>
+          </a:xfrm>
+          <a:prstGeom prst="rect">
+            <a:avLst/>
+          </a:prstGeom>
+          <a:noFill/>
+        </p:spPr>
+        <p:txBody>
+          <a:bodyPr wrap="square" rtlCol="0">
+            <a:spAutoFit/>
+          </a:bodyPr>
+          <a:p>
+            <a:r>
+              <a:rPr lang="zh-CN" altLang="en-US" sz="1600">
                 <a:solidFill>
                   <a:schemeClr val="tx1"/>
                 </a:solidFill>
                 <a:latin typeface="宋体" panose="02010600030101010101" pitchFamily="2" charset="-122"/>
                 <a:ea typeface="宋体" panose="02010600030101010101" pitchFamily="2" charset="-122"/>
                 <a:sym typeface="+mn-ea"/>
-              </a:endParaRPr>
-            </a:p>
-          </p:txBody>
-        </p:sp>
-        <p:sp>
-          <p:nvSpPr>
-            <p:cNvPr id="44" name="文本框 43"/>
-            <p:cNvSpPr txBox="1"/>
-            <p:nvPr/>
-          </p:nvSpPr>
-          <p:spPr>
-            <a:xfrm>
-              <a:off x="11749" y="3653"/>
-              <a:ext cx="2228" cy="531"/>
-            </a:xfrm>
-            <a:prstGeom prst="rect">
-              <a:avLst/>
-            </a:prstGeom>
-            <a:noFill/>
-          </p:spPr>
-          <p:txBody>
-            <a:bodyPr wrap="square" rtlCol="0">
-              <a:spAutoFit/>
-            </a:bodyPr>
-            <a:p>
-              <a:r>
-                <a:rPr lang="zh-CN" altLang="en-US" sz="1600" b="1">
-                  <a:solidFill>
-                    <a:schemeClr val="tx1"/>
-                  </a:solidFill>
-                  <a:latin typeface="宋体" panose="02010600030101010101" pitchFamily="2" charset="-122"/>
-                  <a:ea typeface="宋体" panose="02010600030101010101" pitchFamily="2" charset="-122"/>
-                  <a:sym typeface="+mn-ea"/>
-                </a:rPr>
-                <a:t>光栅化阶段</a:t>
-              </a:r>
-              <a:endParaRPr lang="zh-CN" altLang="en-US" sz="1600" b="1">
+              </a:rPr>
+              <a:t>几何阶段</a:t>
+            </a:r>
+            <a:endParaRPr lang="zh-CN" altLang="en-US" sz="1600">
+              <a:solidFill>
+                <a:schemeClr val="tx1"/>
+              </a:solidFill>
+              <a:latin typeface="宋体" panose="02010600030101010101" pitchFamily="2" charset="-122"/>
+              <a:ea typeface="宋体" panose="02010600030101010101" pitchFamily="2" charset="-122"/>
+              <a:sym typeface="+mn-ea"/>
+            </a:endParaRPr>
+          </a:p>
+        </p:txBody>
+      </p:sp>
+      <p:sp>
+        <p:nvSpPr>
+          <p:cNvPr id="44" name="文本框 43"/>
+          <p:cNvSpPr txBox="1"/>
+          <p:nvPr/>
+        </p:nvSpPr>
+        <p:spPr>
+          <a:xfrm>
+            <a:off x="7241540" y="1002030"/>
+            <a:ext cx="1414780" cy="337185"/>
+          </a:xfrm>
+          <a:prstGeom prst="rect">
+            <a:avLst/>
+          </a:prstGeom>
+          <a:noFill/>
+        </p:spPr>
+        <p:txBody>
+          <a:bodyPr wrap="square" rtlCol="0">
+            <a:spAutoFit/>
+          </a:bodyPr>
+          <a:p>
+            <a:r>
+              <a:rPr lang="zh-CN" altLang="en-US" sz="1600">
                 <a:solidFill>
                   <a:schemeClr val="tx1"/>
                 </a:solidFill>
                 <a:latin typeface="宋体" panose="02010600030101010101" pitchFamily="2" charset="-122"/>
                 <a:ea typeface="宋体" panose="02010600030101010101" pitchFamily="2" charset="-122"/>
                 <a:sym typeface="+mn-ea"/>
-              </a:endParaRPr>
-            </a:p>
-          </p:txBody>
-        </p:sp>
-        <p:cxnSp>
-          <p:nvCxnSpPr>
-            <p:cNvPr id="52" name="肘形连接符 51"/>
-            <p:cNvCxnSpPr>
-              <a:stCxn id="5" idx="0"/>
-            </p:cNvCxnSpPr>
-            <p:nvPr/>
-          </p:nvCxnSpPr>
-          <p:spPr>
-            <a:xfrm rot="16200000" flipH="1">
-              <a:off x="4266" y="1236"/>
-              <a:ext cx="5" cy="4513"/>
-            </a:xfrm>
-            <a:prstGeom prst="bentConnector3">
-              <a:avLst>
-                <a:gd name="adj1" fmla="val -18210000"/>
-              </a:avLst>
-            </a:prstGeom>
-            <a:ln w="12700" cap="flat" cmpd="sng" algn="ctr">
+              </a:rPr>
+              <a:t>光栅化阶段</a:t>
+            </a:r>
+            <a:endParaRPr lang="zh-CN" altLang="en-US" sz="1600">
               <a:solidFill>
                 <a:schemeClr val="tx1"/>
               </a:solidFill>
-              <a:prstDash val="dash"/>
-              <a:miter lim="800000"/>
-              <a:headEnd type="none"/>
-              <a:tailEnd type="triangle" w="med" len="med"/>
-            </a:ln>
-          </p:spPr>
-          <p:style>
-            <a:lnRef idx="0">
-              <a:schemeClr val="accent1"/>
-            </a:lnRef>
-            <a:fillRef idx="0">
-              <a:srgbClr val="FFFFFF"/>
-            </a:fillRef>
-            <a:effectRef idx="0">
-              <a:srgbClr val="FFFFFF"/>
-            </a:effectRef>
-            <a:fontRef idx="minor">
+              <a:latin typeface="宋体" panose="02010600030101010101" pitchFamily="2" charset="-122"/>
+              <a:ea typeface="宋体" panose="02010600030101010101" pitchFamily="2" charset="-122"/>
+              <a:sym typeface="+mn-ea"/>
+            </a:endParaRPr>
+          </a:p>
+        </p:txBody>
+      </p:sp>
+      <p:cxnSp>
+        <p:nvCxnSpPr>
+          <p:cNvPr id="52" name="肘形连接符 51"/>
+          <p:cNvCxnSpPr>
+            <a:stCxn id="5" idx="0"/>
+          </p:cNvCxnSpPr>
+          <p:nvPr/>
+        </p:nvCxnSpPr>
+        <p:spPr>
+          <a:xfrm rot="16200000" flipH="1">
+            <a:off x="2489835" y="-532765"/>
+            <a:ext cx="3175" cy="2865755"/>
+          </a:xfrm>
+          <a:prstGeom prst="bentConnector3">
+            <a:avLst>
+              <a:gd name="adj1" fmla="val -18210000"/>
+            </a:avLst>
+          </a:prstGeom>
+          <a:ln w="12700" cap="flat" cmpd="sng" algn="ctr">
+            <a:solidFill>
               <a:schemeClr val="tx1"/>
-            </a:fontRef>
-          </p:style>
-        </p:cxnSp>
-        <p:cxnSp>
-          <p:nvCxnSpPr>
-            <p:cNvPr id="62" name="肘形连接符 61"/>
-            <p:cNvCxnSpPr/>
-            <p:nvPr/>
-          </p:nvCxnSpPr>
-          <p:spPr>
-            <a:xfrm rot="16200000" flipH="1">
-              <a:off x="10308" y="1209"/>
-              <a:ext cx="5" cy="4513"/>
-            </a:xfrm>
-            <a:prstGeom prst="bentConnector3">
-              <a:avLst>
-                <a:gd name="adj1" fmla="val -18210000"/>
-              </a:avLst>
-            </a:prstGeom>
-            <a:ln w="12700" cap="flat" cmpd="sng" algn="ctr">
-              <a:solidFill>
-                <a:schemeClr val="tx1"/>
-              </a:solidFill>
-              <a:prstDash val="dash"/>
-              <a:miter lim="800000"/>
-              <a:headEnd type="none"/>
-              <a:tailEnd type="triangle" w="med" len="med"/>
-            </a:ln>
-          </p:spPr>
-          <p:style>
-            <a:lnRef idx="0">
-              <a:schemeClr val="accent1"/>
-            </a:lnRef>
-            <a:fillRef idx="0">
-              <a:srgbClr val="FFFFFF"/>
-            </a:fillRef>
-            <a:effectRef idx="0">
-              <a:srgbClr val="FFFFFF"/>
-            </a:effectRef>
-            <a:fontRef idx="minor">
+            </a:solidFill>
+            <a:prstDash val="dash"/>
+            <a:miter lim="800000"/>
+            <a:headEnd type="none"/>
+            <a:tailEnd type="triangle" w="med" len="med"/>
+          </a:ln>
+        </p:spPr>
+        <p:style>
+          <a:lnRef idx="0">
+            <a:schemeClr val="accent1"/>
+          </a:lnRef>
+          <a:fillRef idx="0">
+            <a:srgbClr val="FFFFFF"/>
+          </a:fillRef>
+          <a:effectRef idx="0">
+            <a:srgbClr val="FFFFFF"/>
+          </a:effectRef>
+          <a:fontRef idx="minor">
+            <a:schemeClr val="tx1"/>
+          </a:fontRef>
+        </p:style>
+      </p:cxnSp>
+      <p:cxnSp>
+        <p:nvCxnSpPr>
+          <p:cNvPr id="62" name="肘形连接符 61"/>
+          <p:cNvCxnSpPr/>
+          <p:nvPr/>
+        </p:nvCxnSpPr>
+        <p:spPr>
+          <a:xfrm rot="16200000" flipH="1">
+            <a:off x="6326505" y="-549910"/>
+            <a:ext cx="3175" cy="2865755"/>
+          </a:xfrm>
+          <a:prstGeom prst="bentConnector3">
+            <a:avLst>
+              <a:gd name="adj1" fmla="val -18210000"/>
+            </a:avLst>
+          </a:prstGeom>
+          <a:ln w="12700" cap="flat" cmpd="sng" algn="ctr">
+            <a:solidFill>
               <a:schemeClr val="tx1"/>
-            </a:fontRef>
-          </p:style>
-        </p:cxnSp>
-        <p:sp>
-          <p:nvSpPr>
-            <p:cNvPr id="66" name="文本框 65"/>
-            <p:cNvSpPr txBox="1"/>
-            <p:nvPr/>
-          </p:nvSpPr>
-          <p:spPr>
-            <a:xfrm>
-              <a:off x="3360" y="2028"/>
-              <a:ext cx="2497" cy="531"/>
-            </a:xfrm>
-            <a:prstGeom prst="rect">
-              <a:avLst/>
-            </a:prstGeom>
-            <a:noFill/>
-          </p:spPr>
-          <p:txBody>
-            <a:bodyPr wrap="square" rtlCol="0">
-              <a:spAutoFit/>
-            </a:bodyPr>
-            <a:p>
-              <a:r>
-                <a:rPr lang="zh-CN" altLang="en-US" sz="1600" b="1">
-                  <a:solidFill>
-                    <a:schemeClr val="tx1"/>
-                  </a:solidFill>
-                  <a:latin typeface="宋体" panose="02010600030101010101" pitchFamily="2" charset="-122"/>
-                  <a:ea typeface="宋体" panose="02010600030101010101" pitchFamily="2" charset="-122"/>
-                  <a:sym typeface="+mn-ea"/>
-                </a:rPr>
-                <a:t>输出渲染单元</a:t>
-              </a:r>
-              <a:endParaRPr lang="zh-CN" altLang="en-US" sz="1600" b="1">
+            </a:solidFill>
+            <a:prstDash val="dash"/>
+            <a:miter lim="800000"/>
+            <a:headEnd type="none"/>
+            <a:tailEnd type="triangle" w="med" len="med"/>
+          </a:ln>
+        </p:spPr>
+        <p:style>
+          <a:lnRef idx="0">
+            <a:schemeClr val="accent1"/>
+          </a:lnRef>
+          <a:fillRef idx="0">
+            <a:srgbClr val="FFFFFF"/>
+          </a:fillRef>
+          <a:effectRef idx="0">
+            <a:srgbClr val="FFFFFF"/>
+          </a:effectRef>
+          <a:fontRef idx="minor">
+            <a:schemeClr val="tx1"/>
+          </a:fontRef>
+        </p:style>
+      </p:cxnSp>
+      <p:sp>
+        <p:nvSpPr>
+          <p:cNvPr id="66" name="文本框 65"/>
+          <p:cNvSpPr txBox="1"/>
+          <p:nvPr/>
+        </p:nvSpPr>
+        <p:spPr>
+          <a:xfrm>
+            <a:off x="1914525" y="-29845"/>
+            <a:ext cx="1585595" cy="337185"/>
+          </a:xfrm>
+          <a:prstGeom prst="rect">
+            <a:avLst/>
+          </a:prstGeom>
+          <a:noFill/>
+        </p:spPr>
+        <p:txBody>
+          <a:bodyPr wrap="square" rtlCol="0">
+            <a:spAutoFit/>
+          </a:bodyPr>
+          <a:p>
+            <a:r>
+              <a:rPr lang="zh-CN" altLang="en-US" sz="1600">
                 <a:solidFill>
                   <a:schemeClr val="tx1"/>
                 </a:solidFill>
                 <a:latin typeface="宋体" panose="02010600030101010101" pitchFamily="2" charset="-122"/>
                 <a:ea typeface="宋体" panose="02010600030101010101" pitchFamily="2" charset="-122"/>
                 <a:sym typeface="+mn-ea"/>
-              </a:endParaRPr>
-            </a:p>
-          </p:txBody>
-        </p:sp>
-        <p:sp>
-          <p:nvSpPr>
-            <p:cNvPr id="69" name="文本框 68"/>
-            <p:cNvSpPr txBox="1"/>
-            <p:nvPr/>
-          </p:nvSpPr>
-          <p:spPr>
-            <a:xfrm>
-              <a:off x="8812" y="2085"/>
-              <a:ext cx="4124" cy="531"/>
-            </a:xfrm>
-            <a:prstGeom prst="rect">
-              <a:avLst/>
-            </a:prstGeom>
-            <a:noFill/>
-          </p:spPr>
-          <p:txBody>
-            <a:bodyPr wrap="square" rtlCol="0">
-              <a:spAutoFit/>
-            </a:bodyPr>
-            <a:p>
-              <a:r>
-                <a:rPr lang="zh-CN" altLang="en-US" sz="1600" b="1">
-                  <a:solidFill>
-                    <a:schemeClr val="tx1"/>
-                  </a:solidFill>
-                  <a:latin typeface="宋体" panose="02010600030101010101" pitchFamily="2" charset="-122"/>
-                  <a:ea typeface="宋体" panose="02010600030101010101" pitchFamily="2" charset="-122"/>
-                  <a:sym typeface="+mn-ea"/>
-                </a:rPr>
-                <a:t>输出屏幕空间顶点信息</a:t>
-              </a:r>
-              <a:endParaRPr lang="zh-CN" altLang="en-US" sz="1600" b="1">
+              </a:rPr>
+              <a:t>输出渲染单元</a:t>
+            </a:r>
+            <a:endParaRPr lang="zh-CN" altLang="en-US" sz="1600">
+              <a:solidFill>
+                <a:schemeClr val="tx1"/>
+              </a:solidFill>
+              <a:latin typeface="宋体" panose="02010600030101010101" pitchFamily="2" charset="-122"/>
+              <a:ea typeface="宋体" panose="02010600030101010101" pitchFamily="2" charset="-122"/>
+              <a:sym typeface="+mn-ea"/>
+            </a:endParaRPr>
+          </a:p>
+        </p:txBody>
+      </p:sp>
+      <p:sp>
+        <p:nvSpPr>
+          <p:cNvPr id="69" name="文本框 68"/>
+          <p:cNvSpPr txBox="1"/>
+          <p:nvPr/>
+        </p:nvSpPr>
+        <p:spPr>
+          <a:xfrm>
+            <a:off x="5376545" y="6350"/>
+            <a:ext cx="2618740" cy="337185"/>
+          </a:xfrm>
+          <a:prstGeom prst="rect">
+            <a:avLst/>
+          </a:prstGeom>
+          <a:noFill/>
+        </p:spPr>
+        <p:txBody>
+          <a:bodyPr wrap="square" rtlCol="0">
+            <a:spAutoFit/>
+          </a:bodyPr>
+          <a:p>
+            <a:r>
+              <a:rPr lang="zh-CN" altLang="en-US" sz="1600">
                 <a:solidFill>
                   <a:schemeClr val="tx1"/>
                 </a:solidFill>
                 <a:latin typeface="宋体" panose="02010600030101010101" pitchFamily="2" charset="-122"/>
                 <a:ea typeface="宋体" panose="02010600030101010101" pitchFamily="2" charset="-122"/>
                 <a:sym typeface="+mn-ea"/>
-              </a:endParaRPr>
-            </a:p>
-          </p:txBody>
-        </p:sp>
-        <p:cxnSp>
-          <p:nvCxnSpPr>
-            <p:cNvPr id="81" name="直接箭头连接符 80"/>
-            <p:cNvCxnSpPr/>
-            <p:nvPr/>
-          </p:nvCxnSpPr>
-          <p:spPr>
-            <a:xfrm>
-              <a:off x="14148" y="5041"/>
-              <a:ext cx="1600" cy="12"/>
-            </a:xfrm>
-            <a:prstGeom prst="straightConnector1">
-              <a:avLst/>
-            </a:prstGeom>
-            <a:ln w="19050">
+              </a:rPr>
+              <a:t>输出屏幕空间顶点信息</a:t>
+            </a:r>
+            <a:endParaRPr lang="zh-CN" altLang="en-US" sz="1600">
               <a:solidFill>
                 <a:schemeClr val="tx1"/>
               </a:solidFill>
-              <a:headEnd type="none"/>
-              <a:tailEnd type="triangle" w="med" len="med"/>
-            </a:ln>
-          </p:spPr>
-          <p:style>
-            <a:lnRef idx="2">
-              <a:schemeClr val="accent1"/>
-            </a:lnRef>
-            <a:fillRef idx="0">
-              <a:srgbClr val="FFFFFF"/>
-            </a:fillRef>
-            <a:effectRef idx="0">
-              <a:srgbClr val="FFFFFF"/>
-            </a:effectRef>
-            <a:fontRef idx="minor">
+              <a:latin typeface="宋体" panose="02010600030101010101" pitchFamily="2" charset="-122"/>
+              <a:ea typeface="宋体" panose="02010600030101010101" pitchFamily="2" charset="-122"/>
+              <a:sym typeface="+mn-ea"/>
+            </a:endParaRPr>
+          </a:p>
+        </p:txBody>
+      </p:sp>
+      <p:cxnSp>
+        <p:nvCxnSpPr>
+          <p:cNvPr id="81" name="直接箭头连接符 80"/>
+          <p:cNvCxnSpPr/>
+          <p:nvPr/>
+        </p:nvCxnSpPr>
+        <p:spPr>
+          <a:xfrm>
+            <a:off x="8764905" y="1883410"/>
+            <a:ext cx="1016000" cy="7620"/>
+          </a:xfrm>
+          <a:prstGeom prst="straightConnector1">
+            <a:avLst/>
+          </a:prstGeom>
+          <a:ln w="19050">
+            <a:solidFill>
               <a:schemeClr val="tx1"/>
-            </a:fontRef>
-          </p:style>
-        </p:cxnSp>
-        <p:sp>
-          <p:nvSpPr>
-            <p:cNvPr id="83" name="文本框 82"/>
-            <p:cNvSpPr txBox="1"/>
-            <p:nvPr/>
-          </p:nvSpPr>
-          <p:spPr>
-            <a:xfrm>
-              <a:off x="15522" y="4542"/>
-              <a:ext cx="2441" cy="938"/>
-            </a:xfrm>
-            <a:prstGeom prst="rect">
-              <a:avLst/>
-            </a:prstGeom>
-            <a:noFill/>
-          </p:spPr>
-          <p:txBody>
-            <a:bodyPr wrap="square" rtlCol="0">
-              <a:noAutofit/>
-            </a:bodyPr>
-            <a:p>
-              <a:pPr algn="ctr"/>
-              <a:r>
-                <a:rPr lang="zh-CN" altLang="en-US" sz="1600" b="1">
-                  <a:solidFill>
-                    <a:schemeClr val="tx1"/>
-                  </a:solidFill>
-                  <a:latin typeface="宋体" panose="02010600030101010101" pitchFamily="2" charset="-122"/>
-                  <a:ea typeface="宋体" panose="02010600030101010101" pitchFamily="2" charset="-122"/>
-                  <a:sym typeface="+mn-ea"/>
-                </a:rPr>
-                <a:t>像素数据写入</a:t>
-              </a:r>
-              <a:endParaRPr lang="zh-CN" altLang="en-US" sz="1600" b="1">
+            </a:solidFill>
+            <a:headEnd type="none"/>
+            <a:tailEnd type="triangle" w="med" len="med"/>
+          </a:ln>
+        </p:spPr>
+        <p:style>
+          <a:lnRef idx="2">
+            <a:schemeClr val="accent1"/>
+          </a:lnRef>
+          <a:fillRef idx="0">
+            <a:srgbClr val="FFFFFF"/>
+          </a:fillRef>
+          <a:effectRef idx="0">
+            <a:srgbClr val="FFFFFF"/>
+          </a:effectRef>
+          <a:fontRef idx="minor">
+            <a:schemeClr val="tx1"/>
+          </a:fontRef>
+        </p:style>
+      </p:cxnSp>
+      <p:sp>
+        <p:nvSpPr>
+          <p:cNvPr id="83" name="文本框 82"/>
+          <p:cNvSpPr txBox="1"/>
+          <p:nvPr/>
+        </p:nvSpPr>
+        <p:spPr>
+          <a:xfrm>
+            <a:off x="9637395" y="1566545"/>
+            <a:ext cx="1550035" cy="595630"/>
+          </a:xfrm>
+          <a:prstGeom prst="rect">
+            <a:avLst/>
+          </a:prstGeom>
+          <a:noFill/>
+        </p:spPr>
+        <p:txBody>
+          <a:bodyPr wrap="square" rtlCol="0">
+            <a:noAutofit/>
+          </a:bodyPr>
+          <a:p>
+            <a:pPr algn="ctr"/>
+            <a:r>
+              <a:rPr lang="zh-CN" altLang="en-US" sz="1600">
                 <a:solidFill>
                   <a:schemeClr val="tx1"/>
                 </a:solidFill>
                 <a:latin typeface="宋体" panose="02010600030101010101" pitchFamily="2" charset="-122"/>
                 <a:ea typeface="宋体" panose="02010600030101010101" pitchFamily="2" charset="-122"/>
                 <a:sym typeface="+mn-ea"/>
-              </a:endParaRPr>
-            </a:p>
-            <a:p>
-              <a:pPr algn="ctr"/>
-              <a:r>
-                <a:rPr lang="zh-CN" altLang="en-US" sz="1600" b="1">
-                  <a:solidFill>
-                    <a:schemeClr val="tx1"/>
-                  </a:solidFill>
-                  <a:latin typeface="宋体" panose="02010600030101010101" pitchFamily="2" charset="-122"/>
-                  <a:ea typeface="宋体" panose="02010600030101010101" pitchFamily="2" charset="-122"/>
-                  <a:sym typeface="+mn-ea"/>
-                </a:rPr>
-                <a:t>帧缓冲区</a:t>
-              </a:r>
-              <a:endParaRPr lang="zh-CN" altLang="en-US" sz="1600" b="1">
+              </a:rPr>
+              <a:t>像素数据写入</a:t>
+            </a:r>
+            <a:endParaRPr lang="zh-CN" altLang="en-US" sz="1600">
+              <a:solidFill>
+                <a:schemeClr val="tx1"/>
+              </a:solidFill>
+              <a:latin typeface="宋体" panose="02010600030101010101" pitchFamily="2" charset="-122"/>
+              <a:ea typeface="宋体" panose="02010600030101010101" pitchFamily="2" charset="-122"/>
+              <a:sym typeface="+mn-ea"/>
+            </a:endParaRPr>
+          </a:p>
+          <a:p>
+            <a:pPr algn="ctr"/>
+            <a:r>
+              <a:rPr lang="zh-CN" altLang="en-US" sz="1600">
                 <a:solidFill>
                   <a:schemeClr val="tx1"/>
                 </a:solidFill>
                 <a:latin typeface="宋体" panose="02010600030101010101" pitchFamily="2" charset="-122"/>
                 <a:ea typeface="宋体" panose="02010600030101010101" pitchFamily="2" charset="-122"/>
                 <a:sym typeface="+mn-ea"/>
-              </a:endParaRPr>
-            </a:p>
-          </p:txBody>
-        </p:sp>
-      </p:grpSp>
+              </a:rPr>
+              <a:t>帧缓冲区</a:t>
+            </a:r>
+            <a:endParaRPr lang="zh-CN" altLang="en-US" sz="1600">
+              <a:solidFill>
+                <a:schemeClr val="tx1"/>
+              </a:solidFill>
+              <a:latin typeface="宋体" panose="02010600030101010101" pitchFamily="2" charset="-122"/>
+              <a:ea typeface="宋体" panose="02010600030101010101" pitchFamily="2" charset="-122"/>
+              <a:sym typeface="+mn-ea"/>
+            </a:endParaRPr>
+          </a:p>
+        </p:txBody>
+      </p:sp>
     </p:spTree>
   </p:cSld>
   <p:clrMapOvr>
